--- a/system-design-101/vi/lessons/sd-11-037/slides/sd-11-037.pptx
+++ b/system-design-101/vi/lessons/sd-11-037/slides/sd-11-037.pptx
@@ -6854,7 +6854,7 @@
               <a:t> báo</a:t>
             </a:r>
             <a:r>
-              <a:rPr lang="en-US" sz="3150" b="1" dirty="0" spc="-4" kern="0">
+              <a:rPr lang="en-US" sz="3150" b="1" dirty="0" spc="-10" kern="0">
                 <a:solidFill>
                   <a:srgbClr val="F3EEE3"/>
                 </a:solidFill>
@@ -6862,7 +6862,7 @@
                 <a:ea typeface="Be Vietnam Pro" pitchFamily="34" charset="-122"/>
                 <a:cs typeface="Be Vietnam Pro" pitchFamily="34" charset="-120"/>
               </a:rPr>
-              <a:t> hai</a:t>
+              <a:t> không</a:t>
             </a:r>
             <a:r>
               <a:rPr lang="en-US" sz="3150" b="1" dirty="0" spc="1" kern="0">
@@ -6873,7 +6873,18 @@
                 <a:ea typeface="Be Vietnam Pro" pitchFamily="34" charset="-122"/>
                 <a:cs typeface="Be Vietnam Pro" pitchFamily="34" charset="-120"/>
               </a:rPr>
-              <a:t> phút.</a:t>
+              <a:t> bảo</a:t>
+            </a:r>
+            <a:r>
+              <a:rPr lang="en-US" sz="3150" b="1" dirty="0" spc="9" kern="0">
+                <a:solidFill>
+                  <a:srgbClr val="F3EEE3"/>
+                </a:solidFill>
+                <a:latin typeface="Be Vietnam Pro" pitchFamily="34" charset="0"/>
+                <a:ea typeface="Be Vietnam Pro" pitchFamily="34" charset="-122"/>
+                <a:cs typeface="Be Vietnam Pro" pitchFamily="34" charset="-120"/>
+              </a:rPr>
+              <a:t> đảm.</a:t>
             </a:r>
             <a:endParaRPr lang="en-US" sz="3150" dirty="0"/>
           </a:p>

--- a/system-design-101/vi/lessons/sd-11-037/slides/sd-11-037.pptx
+++ b/system-design-101/vi/lessons/sd-11-037/slides/sd-11-037.pptx
@@ -7382,6 +7382,28 @@
               <a:t> ·</a:t>
             </a:r>
             <a:r>
+              <a:rPr lang="en-US" sz="1800" b="1" spc="279" kern="0" dirty="0">
+                <a:solidFill>
+                  <a:srgbClr val="E8472B"/>
+                </a:solidFill>
+                <a:latin typeface="Be Vietnam Pro" pitchFamily="34" charset="0"/>
+                <a:ea typeface="Be Vietnam Pro" pitchFamily="34" charset="-122"/>
+                <a:cs typeface="Be Vietnam Pro" pitchFamily="34" charset="-120"/>
+              </a:rPr>
+              <a:t> TỐI</a:t>
+            </a:r>
+            <a:r>
+              <a:rPr lang="en-US" sz="1800" b="1" spc="332" kern="0" dirty="0">
+                <a:solidFill>
+                  <a:srgbClr val="E8472B"/>
+                </a:solidFill>
+                <a:latin typeface="Be Vietnam Pro" pitchFamily="34" charset="0"/>
+                <a:ea typeface="Be Vietnam Pro" pitchFamily="34" charset="-122"/>
+                <a:cs typeface="Be Vietnam Pro" pitchFamily="34" charset="-120"/>
+              </a:rPr>
+              <a:t> ƯU</a:t>
+            </a:r>
+            <a:r>
               <a:rPr lang="en-US" sz="1800" b="1" spc="306" kern="0" dirty="0">
                 <a:solidFill>
                   <a:srgbClr val="E8472B"/>
@@ -7393,18 +7415,7 @@
               <a:t> CHUYỂN</a:t>
             </a:r>
             <a:r>
-              <a:rPr lang="en-US" sz="1800" b="1" spc="298" kern="0" dirty="0">
-                <a:solidFill>
-                  <a:srgbClr val="E8472B"/>
-                </a:solidFill>
-                <a:latin typeface="Be Vietnam Pro" pitchFamily="34" charset="0"/>
-                <a:ea typeface="Be Vietnam Pro" pitchFamily="34" charset="-122"/>
-                <a:cs typeface="Be Vietnam Pro" pitchFamily="34" charset="-120"/>
-              </a:rPr>
-              <a:t> ÍT</a:t>
-            </a:r>
-            <a:r>
-              <a:rPr lang="en-US" sz="1800" b="1" spc="303" kern="0" dirty="0">
+              <a:rPr lang="en-US" sz="1800" b="1" spc="302" kern="0" dirty="0">
                 <a:solidFill>
                   <a:srgbClr val="E8472B"/>
                 </a:solidFill>
@@ -7457,7 +7468,7 @@
               <a:buNone/>
             </a:pPr>
             <a:r>
-              <a:rPr lang="en-US" sz="6900" dirty="0" spc="3" kern="0">
+              <a:rPr lang="en-US" sz="6900" dirty="0" spc="-34" kern="0">
                 <a:solidFill>
                   <a:srgbClr val="14161C"/>
                 </a:solidFill>
@@ -7465,10 +7476,10 @@
                 <a:ea typeface="Bricolage Grotesque ExtraBold" pitchFamily="34" charset="-122"/>
                 <a:cs typeface="Bricolage Grotesque ExtraBold" pitchFamily="34" charset="-120"/>
               </a:rPr>
-              <a:t>Để</a:t>
-            </a:r>
-            <a:r>
-              <a:rPr lang="en-US" sz="6900" dirty="0" spc="-2" kern="0">
+              <a:t>Bớt</a:t>
+            </a:r>
+            <a:r>
+              <a:rPr lang="en-US" sz="6900" dirty="0" spc="-21" kern="0">
                 <a:solidFill>
                   <a:srgbClr val="14161C"/>
                 </a:solidFill>
@@ -7476,10 +7487,10 @@
                 <a:ea typeface="Bricolage Grotesque ExtraBold" pitchFamily="34" charset="-122"/>
                 <a:cs typeface="Bricolage Grotesque ExtraBold" pitchFamily="34" charset="-120"/>
               </a:rPr>
-              <a:t> dữ</a:t>
-            </a:r>
-            <a:r>
-              <a:rPr lang="en-US" sz="6900" dirty="0" spc="8" kern="0">
+              <a:t> byte,</a:t>
+            </a:r>
+            <a:r>
+              <a:rPr lang="en-US" sz="6900" dirty="0" spc="13" kern="0">
                 <a:solidFill>
                   <a:srgbClr val="14161C"/>
                 </a:solidFill>
@@ -7487,10 +7498,10 @@
                 <a:ea typeface="Bricolage Grotesque ExtraBold" pitchFamily="34" charset="-122"/>
                 <a:cs typeface="Bricolage Grotesque ExtraBold" pitchFamily="34" charset="-120"/>
               </a:rPr>
-              <a:t> liệu</a:t>
-            </a:r>
-            <a:r>
-              <a:rPr lang="en-US" sz="6900" dirty="0" spc="1" kern="0">
+              <a:t> đổi</a:t>
+            </a:r>
+            <a:r>
+              <a:rPr lang="en-US" sz="6900" dirty="0" spc="-39" kern="0">
                 <a:solidFill>
                   <a:srgbClr val="14161C"/>
                 </a:solidFill>
@@ -7498,10 +7509,10 @@
                 <a:ea typeface="Bricolage Grotesque ExtraBold" pitchFamily="34" charset="-122"/>
                 <a:cs typeface="Bricolage Grotesque ExtraBold" pitchFamily="34" charset="-120"/>
               </a:rPr>
-              <a:t> ít</a:t>
-            </a:r>
-            <a:r>
-              <a:rPr lang="en-US" sz="6900" dirty="0" spc="4" kern="0">
+              <a:t> đường,</a:t>
+            </a:r>
+            <a:r>
+              <a:rPr lang="en-US" sz="6900" dirty="0" spc="14" kern="0">
                 <a:solidFill>
                   <a:srgbClr val="14161C"/>
                 </a:solidFill>
@@ -7509,10 +7520,10 @@
                 <a:ea typeface="Bricolage Grotesque ExtraBold" pitchFamily="34" charset="-122"/>
                 <a:cs typeface="Bricolage Grotesque ExtraBold" pitchFamily="34" charset="-120"/>
               </a:rPr>
-              <a:t> phải</a:t>
-            </a:r>
-            <a:r>
-              <a:rPr lang="en-US" sz="6900" dirty="0" spc="36" kern="0">
+              <a:t> đổi</a:t>
+            </a:r>
+            <a:r>
+              <a:rPr lang="en-US" sz="6900" dirty="0" spc="4" kern="0">
                 <a:solidFill>
                   <a:srgbClr val="14161C"/>
                 </a:solidFill>
@@ -7520,18 +7531,7 @@
                 <a:ea typeface="Bricolage Grotesque ExtraBold" pitchFamily="34" charset="-122"/>
                 <a:cs typeface="Bricolage Grotesque ExtraBold" pitchFamily="34" charset="-120"/>
               </a:rPr>
-              <a:t> đi</a:t>
-            </a:r>
-            <a:r>
-              <a:rPr lang="en-US" sz="6900" dirty="0" spc="-46" kern="0">
-                <a:solidFill>
-                  <a:srgbClr val="14161C"/>
-                </a:solidFill>
-                <a:latin typeface="Bricolage Grotesque ExtraBold" pitchFamily="34" charset="0"/>
-                <a:ea typeface="Bricolage Grotesque ExtraBold" pitchFamily="34" charset="-122"/>
-                <a:cs typeface="Bricolage Grotesque ExtraBold" pitchFamily="34" charset="-120"/>
-              </a:rPr>
-              <a:t> xa</a:t>
+              <a:t> phí</a:t>
             </a:r>
             <a:endParaRPr lang="en-US" sz="6900" dirty="0"/>
           </a:p>
@@ -7761,40 +7761,40 @@
               <a:buNone/>
             </a:pPr>
             <a:r>
-              <a:rPr lang="en-US" sz="2850" dirty="0" spc="-2" kern="0">
-                <a:solidFill>
-                  <a:srgbClr val="14161C"/>
-                </a:solidFill>
-                <a:latin typeface="Be Vietnam Pro" pitchFamily="34" charset="0"/>
-                <a:ea typeface="Be Vietnam Pro" pitchFamily="34" charset="-122"/>
-                <a:cs typeface="Be Vietnam Pro" pitchFamily="34" charset="-120"/>
-              </a:rPr>
-              <a:t>Dữ</a:t>
+              <a:rPr lang="en-US" sz="2850" dirty="0" spc="60" kern="0">
+                <a:solidFill>
+                  <a:srgbClr val="14161C"/>
+                </a:solidFill>
+                <a:latin typeface="Be Vietnam Pro" pitchFamily="34" charset="0"/>
+                <a:ea typeface="Be Vietnam Pro" pitchFamily="34" charset="-122"/>
+                <a:cs typeface="Be Vietnam Pro" pitchFamily="34" charset="-120"/>
+              </a:rPr>
+              <a:t>Gửi</a:t>
+            </a:r>
+            <a:r>
+              <a:rPr lang="en-US" sz="2850" dirty="0" spc="-1" kern="0">
+                <a:solidFill>
+                  <a:srgbClr val="14161C"/>
+                </a:solidFill>
+                <a:latin typeface="Be Vietnam Pro" pitchFamily="34" charset="0"/>
+                <a:ea typeface="Be Vietnam Pro" pitchFamily="34" charset="-122"/>
+                <a:cs typeface="Be Vietnam Pro" pitchFamily="34" charset="-120"/>
+              </a:rPr>
+              <a:t> ít</a:t>
+            </a:r>
+            <a:r>
+              <a:rPr lang="en-US" sz="2850" dirty="0" spc="-22" kern="0">
+                <a:solidFill>
+                  <a:srgbClr val="14161C"/>
+                </a:solidFill>
+                <a:latin typeface="Be Vietnam Pro" pitchFamily="34" charset="0"/>
+                <a:ea typeface="Be Vietnam Pro" pitchFamily="34" charset="-122"/>
+                <a:cs typeface="Be Vietnam Pro" pitchFamily="34" charset="-120"/>
+              </a:rPr>
+              <a:t> byte</a:t>
             </a:r>
             <a:r>
               <a:rPr lang="en-US" sz="2850" dirty="0" spc="2" kern="0">
-                <a:solidFill>
-                  <a:srgbClr val="14161C"/>
-                </a:solidFill>
-                <a:latin typeface="Be Vietnam Pro" pitchFamily="34" charset="0"/>
-                <a:ea typeface="Be Vietnam Pro" pitchFamily="34" charset="-122"/>
-                <a:cs typeface="Be Vietnam Pro" pitchFamily="34" charset="-120"/>
-              </a:rPr>
-              <a:t> liệu</a:t>
-            </a:r>
-            <a:r>
-              <a:rPr lang="en-US" sz="2850" dirty="0" spc="-1" kern="0">
-                <a:solidFill>
-                  <a:srgbClr val="14161C"/>
-                </a:solidFill>
-                <a:latin typeface="Be Vietnam Pro" pitchFamily="34" charset="0"/>
-                <a:ea typeface="Be Vietnam Pro" pitchFamily="34" charset="-122"/>
-                <a:cs typeface="Be Vietnam Pro" pitchFamily="34" charset="-120"/>
-              </a:rPr>
-              <a:t> nhỏ</a:t>
-            </a:r>
-            <a:r>
-              <a:rPr lang="en-US" sz="2850" dirty="0" spc="1" kern="0">
                 <a:solidFill>
                   <a:srgbClr val="14161C"/>
                 </a:solidFill>
@@ -7910,15 +7910,59 @@
               <a:buNone/>
             </a:pPr>
             <a:r>
-              <a:rPr lang="en-US" sz="2850" dirty="0" spc="-17" kern="0">
-                <a:solidFill>
-                  <a:srgbClr val="14161C"/>
-                </a:solidFill>
-                <a:latin typeface="Be Vietnam Pro" pitchFamily="34" charset="0"/>
-                <a:ea typeface="Be Vietnam Pro" pitchFamily="34" charset="-122"/>
-                <a:cs typeface="Be Vietnam Pro" pitchFamily="34" charset="-120"/>
-              </a:rPr>
-              <a:t>Phát</a:t>
+              <a:rPr lang="en-US" sz="2850" dirty="0" spc="-2" kern="0">
+                <a:solidFill>
+                  <a:srgbClr val="14161C"/>
+                </a:solidFill>
+                <a:latin typeface="Be Vietnam Pro" pitchFamily="34" charset="0"/>
+                <a:ea typeface="Be Vietnam Pro" pitchFamily="34" charset="-122"/>
+                <a:cs typeface="Be Vietnam Pro" pitchFamily="34" charset="-120"/>
+              </a:rPr>
+              <a:t>Đổi</a:t>
+            </a:r>
+            <a:r>
+              <a:rPr lang="en-US" sz="2850" dirty="0" spc="6" kern="0">
+                <a:solidFill>
+                  <a:srgbClr val="14161C"/>
+                </a:solidFill>
+                <a:latin typeface="Be Vietnam Pro" pitchFamily="34" charset="0"/>
+                <a:ea typeface="Be Vietnam Pro" pitchFamily="34" charset="-122"/>
+                <a:cs typeface="Be Vietnam Pro" pitchFamily="34" charset="-120"/>
+              </a:rPr>
+              <a:t> đường</a:t>
+            </a:r>
+            <a:r>
+              <a:rPr lang="en-US" sz="2850" dirty="0" spc="41" kern="0">
+                <a:solidFill>
+                  <a:srgbClr val="14161C"/>
+                </a:solidFill>
+                <a:latin typeface="Be Vietnam Pro" pitchFamily="34" charset="0"/>
+                <a:ea typeface="Be Vietnam Pro" pitchFamily="34" charset="-122"/>
+                <a:cs typeface="Be Vietnam Pro" pitchFamily="34" charset="-120"/>
+              </a:rPr>
+              <a:t> đi</a:t>
+            </a:r>
+            <a:r>
+              <a:rPr lang="en-US" sz="2850" dirty="0" spc="-16" kern="0">
+                <a:solidFill>
+                  <a:srgbClr val="14161C"/>
+                </a:solidFill>
+                <a:latin typeface="Be Vietnam Pro" pitchFamily="34" charset="0"/>
+                <a:ea typeface="Be Vietnam Pro" pitchFamily="34" charset="-122"/>
+                <a:cs typeface="Be Vietnam Pro" pitchFamily="34" charset="-120"/>
+              </a:rPr>
+              <a:t> và</a:t>
+            </a:r>
+            <a:r>
+              <a:rPr lang="en-US" sz="2850" dirty="0" spc="9" kern="0">
+                <a:solidFill>
+                  <a:srgbClr val="14161C"/>
+                </a:solidFill>
+                <a:latin typeface="Be Vietnam Pro" pitchFamily="34" charset="0"/>
+                <a:ea typeface="Be Vietnam Pro" pitchFamily="34" charset="-122"/>
+                <a:cs typeface="Be Vietnam Pro" pitchFamily="34" charset="-120"/>
+              </a:rPr>
+              <a:t> mức</a:t>
             </a:r>
             <a:r>
               <a:rPr lang="en-US" sz="2850" dirty="0" spc="0" kern="0">
@@ -7929,73 +7973,18 @@
                 <a:ea typeface="Be Vietnam Pro" pitchFamily="34" charset="-122"/>
                 <a:cs typeface="Be Vietnam Pro" pitchFamily="34" charset="-120"/>
               </a:rPr>
-              <a:t> nội</a:t>
-            </a:r>
-            <a:r>
-              <a:rPr lang="en-US" sz="2850" dirty="0" spc="-1" kern="0">
-                <a:solidFill>
-                  <a:srgbClr val="14161C"/>
-                </a:solidFill>
-                <a:latin typeface="Be Vietnam Pro" pitchFamily="34" charset="0"/>
-                <a:ea typeface="Be Vietnam Pro" pitchFamily="34" charset="-122"/>
-                <a:cs typeface="Be Vietnam Pro" pitchFamily="34" charset="-120"/>
-              </a:rPr>
-              <a:t> dung</a:t>
-            </a:r>
-            <a:r>
-              <a:rPr lang="en-US" sz="2850" dirty="0" spc="-2" kern="0">
-                <a:solidFill>
-                  <a:srgbClr val="14161C"/>
-                </a:solidFill>
-                <a:latin typeface="Be Vietnam Pro" pitchFamily="34" charset="0"/>
-                <a:ea typeface="Be Vietnam Pro" pitchFamily="34" charset="-122"/>
-                <a:cs typeface="Be Vietnam Pro" pitchFamily="34" charset="-120"/>
-              </a:rPr>
-              <a:t> từ</a:t>
-            </a:r>
-            <a:r>
-              <a:rPr lang="en-US" sz="2850" dirty="0" spc="-11" kern="0">
-                <a:solidFill>
-                  <a:srgbClr val="14161C"/>
-                </a:solidFill>
-                <a:latin typeface="Be Vietnam Pro" pitchFamily="34" charset="0"/>
-                <a:ea typeface="Be Vietnam Pro" pitchFamily="34" charset="-122"/>
-                <a:cs typeface="Be Vietnam Pro" pitchFamily="34" charset="-120"/>
-              </a:rPr>
-              <a:t> máy</a:t>
-            </a:r>
-            <a:r>
-              <a:rPr lang="en-US" sz="2850" dirty="0" spc="-15" kern="0">
-                <a:solidFill>
-                  <a:srgbClr val="14161C"/>
-                </a:solidFill>
-                <a:latin typeface="Be Vietnam Pro" pitchFamily="34" charset="0"/>
-                <a:ea typeface="Be Vietnam Pro" pitchFamily="34" charset="-122"/>
-                <a:cs typeface="Be Vietnam Pro" pitchFamily="34" charset="-120"/>
-              </a:rPr>
-              <a:t> gần</a:t>
-            </a:r>
-            <a:r>
-              <a:rPr lang="en-US" sz="2850" dirty="0" spc="7" kern="0">
-                <a:solidFill>
-                  <a:srgbClr val="14161C"/>
-                </a:solidFill>
-                <a:latin typeface="Be Vietnam Pro" pitchFamily="34" charset="0"/>
-                <a:ea typeface="Be Vietnam Pro" pitchFamily="34" charset="-122"/>
-                <a:cs typeface="Be Vietnam Pro" pitchFamily="34" charset="-120"/>
-              </a:rPr>
-              <a:t> người</a:t>
-            </a:r>
-            <a:r>
-              <a:rPr lang="en-US" sz="2850" dirty="0" spc="-2" kern="0">
-                <a:solidFill>
-                  <a:srgbClr val="14161C"/>
-                </a:solidFill>
-                <a:latin typeface="Be Vietnam Pro" pitchFamily="34" charset="0"/>
-                <a:ea typeface="Be Vietnam Pro" pitchFamily="34" charset="-122"/>
-                <a:cs typeface="Be Vietnam Pro" pitchFamily="34" charset="-120"/>
-              </a:rPr>
-              <a:t> dùng.</a:t>
+              <a:t> phí</a:t>
+            </a:r>
+            <a:r>
+              <a:rPr lang="en-US" sz="2850" dirty="0" spc="-12" kern="0">
+                <a:solidFill>
+                  <a:srgbClr val="14161C"/>
+                </a:solidFill>
+                <a:latin typeface="Be Vietnam Pro" pitchFamily="34" charset="0"/>
+                <a:ea typeface="Be Vietnam Pro" pitchFamily="34" charset="-122"/>
+                <a:cs typeface="Be Vietnam Pro" pitchFamily="34" charset="-120"/>
+              </a:rPr>
+              <a:t> truyền.</a:t>
             </a:r>
             <a:endParaRPr lang="en-US" sz="2850" dirty="0"/>
           </a:p>
@@ -8144,18 +8133,40 @@
                 <a:ea typeface="Be Vietnam Pro" pitchFamily="34" charset="-122"/>
                 <a:cs typeface="Be Vietnam Pro" pitchFamily="34" charset="-120"/>
               </a:rPr>
-              <a:t>Dữ</a:t>
-            </a:r>
-            <a:r>
-              <a:rPr lang="en-US" sz="2850" dirty="0" spc="2" kern="0">
-                <a:solidFill>
-                  <a:srgbClr val="14161C"/>
-                </a:solidFill>
-                <a:latin typeface="Be Vietnam Pro" pitchFamily="34" charset="0"/>
-                <a:ea typeface="Be Vietnam Pro" pitchFamily="34" charset="-122"/>
-                <a:cs typeface="Be Vietnam Pro" pitchFamily="34" charset="-120"/>
-              </a:rPr>
-              <a:t> liệu</a:t>
+              <a:t>Đổi</a:t>
+            </a:r>
+            <a:r>
+              <a:rPr lang="en-US" sz="2850" dirty="0" spc="6" kern="0">
+                <a:solidFill>
+                  <a:srgbClr val="14161C"/>
+                </a:solidFill>
+                <a:latin typeface="Be Vietnam Pro" pitchFamily="34" charset="0"/>
+                <a:ea typeface="Be Vietnam Pro" pitchFamily="34" charset="-122"/>
+                <a:cs typeface="Be Vietnam Pro" pitchFamily="34" charset="-120"/>
+              </a:rPr>
+              <a:t> đường</a:t>
+            </a:r>
+            <a:r>
+              <a:rPr lang="en-US" sz="2850" dirty="0" spc="31" kern="0">
+                <a:solidFill>
+                  <a:srgbClr val="14161C"/>
+                </a:solidFill>
+                <a:latin typeface="Be Vietnam Pro" pitchFamily="34" charset="0"/>
+                <a:ea typeface="Be Vietnam Pro" pitchFamily="34" charset="-122"/>
+                <a:cs typeface="Be Vietnam Pro" pitchFamily="34" charset="-120"/>
+              </a:rPr>
+              <a:t> đi,</a:t>
+            </a:r>
+            <a:r>
+              <a:rPr lang="en-US" sz="2850" dirty="0" spc="-2" kern="0">
+                <a:solidFill>
+                  <a:srgbClr val="14161C"/>
+                </a:solidFill>
+                <a:latin typeface="Be Vietnam Pro" pitchFamily="34" charset="0"/>
+                <a:ea typeface="Be Vietnam Pro" pitchFamily="34" charset="-122"/>
+                <a:cs typeface="Be Vietnam Pro" pitchFamily="34" charset="-120"/>
+              </a:rPr>
+              <a:t> không</a:t>
             </a:r>
             <a:r>
               <a:rPr lang="en-US" sz="2850" dirty="0" spc="-1" kern="0">
@@ -8166,40 +8177,18 @@
                 <a:ea typeface="Be Vietnam Pro" pitchFamily="34" charset="-122"/>
                 <a:cs typeface="Be Vietnam Pro" pitchFamily="34" charset="-120"/>
               </a:rPr>
-              <a:t> ít</a:t>
-            </a:r>
-            <a:r>
-              <a:rPr lang="en-US" sz="2850" dirty="0" spc="1" kern="0">
-                <a:solidFill>
-                  <a:srgbClr val="14161C"/>
-                </a:solidFill>
-                <a:latin typeface="Be Vietnam Pro" pitchFamily="34" charset="0"/>
-                <a:ea typeface="Be Vietnam Pro" pitchFamily="34" charset="-122"/>
-                <a:cs typeface="Be Vietnam Pro" pitchFamily="34" charset="-120"/>
-              </a:rPr>
-              <a:t> phải</a:t>
-            </a:r>
-            <a:r>
-              <a:rPr lang="en-US" sz="2850" dirty="0" spc="40" kern="0">
-                <a:solidFill>
-                  <a:srgbClr val="14161C"/>
-                </a:solidFill>
-                <a:latin typeface="Be Vietnam Pro" pitchFamily="34" charset="0"/>
-                <a:ea typeface="Be Vietnam Pro" pitchFamily="34" charset="-122"/>
-                <a:cs typeface="Be Vietnam Pro" pitchFamily="34" charset="-120"/>
-              </a:rPr>
-              <a:t> đi</a:t>
-            </a:r>
-            <a:r>
-              <a:rPr lang="en-US" sz="2850" dirty="0" spc="-17" kern="0">
-                <a:solidFill>
-                  <a:srgbClr val="14161C"/>
-                </a:solidFill>
-                <a:latin typeface="Be Vietnam Pro" pitchFamily="34" charset="0"/>
-                <a:ea typeface="Be Vietnam Pro" pitchFamily="34" charset="-122"/>
-                <a:cs typeface="Be Vietnam Pro" pitchFamily="34" charset="-120"/>
-              </a:rPr>
-              <a:t> xa.</a:t>
+              <a:t> giảm</a:t>
+            </a:r>
+            <a:r>
+              <a:rPr lang="en-US" sz="2850" dirty="0" spc="-18" kern="0">
+                <a:solidFill>
+                  <a:srgbClr val="14161C"/>
+                </a:solidFill>
+                <a:latin typeface="Be Vietnam Pro" pitchFamily="34" charset="0"/>
+                <a:ea typeface="Be Vietnam Pro" pitchFamily="34" charset="-122"/>
+                <a:cs typeface="Be Vietnam Pro" pitchFamily="34" charset="-120"/>
+              </a:rPr>
+              <a:t> byte.</a:t>
             </a:r>
             <a:endParaRPr lang="en-US" sz="2850" dirty="0"/>
           </a:p>

--- a/system-design-101/vi/lessons/sd-11-037/slides/sd-11-037.pptx
+++ b/system-design-101/vi/lessons/sd-11-037/slides/sd-11-037.pptx
@@ -2527,7 +2527,7 @@
               <a:buNone/>
             </a:pPr>
             <a:r>
-              <a:rPr lang="en-US" sz="2250" b="1" dirty="0" spc="-12" kern="0">
+              <a:rPr lang="en-US" sz="2250" b="1" dirty="0" spc="-71" kern="0">
                 <a:solidFill>
                   <a:srgbClr val="FF6A4D"/>
                 </a:solidFill>
@@ -2535,10 +2535,10 @@
                 <a:ea typeface="Be Vietnam Pro" pitchFamily="34" charset="-122"/>
                 <a:cs typeface="Be Vietnam Pro" pitchFamily="34" charset="-120"/>
               </a:rPr>
-              <a:t>Chuyển</a:t>
-            </a:r>
-            <a:r>
-              <a:rPr lang="en-US" sz="2250" b="1" dirty="0" spc="2" kern="0">
+              <a:t>Tối</a:t>
+            </a:r>
+            <a:r>
+              <a:rPr lang="en-US" sz="2250" b="1" dirty="0" spc="39" kern="0">
                 <a:solidFill>
                   <a:srgbClr val="FF6A4D"/>
                 </a:solidFill>
@@ -2546,7 +2546,18 @@
                 <a:ea typeface="Be Vietnam Pro" pitchFamily="34" charset="-122"/>
                 <a:cs typeface="Be Vietnam Pro" pitchFamily="34" charset="-120"/>
               </a:rPr>
-              <a:t> ít</a:t>
+              <a:t> ưu</a:t>
+            </a:r>
+            <a:r>
+              <a:rPr lang="en-US" sz="2250" b="1" dirty="0" spc="-10" kern="0">
+                <a:solidFill>
+                  <a:srgbClr val="FF6A4D"/>
+                </a:solidFill>
+                <a:latin typeface="Be Vietnam Pro" pitchFamily="34" charset="0"/>
+                <a:ea typeface="Be Vietnam Pro" pitchFamily="34" charset="-122"/>
+                <a:cs typeface="Be Vietnam Pro" pitchFamily="34" charset="-120"/>
+              </a:rPr>
+              <a:t> chuyển</a:t>
             </a:r>
             <a:r>
               <a:rPr lang="en-US" sz="2250" b="1" dirty="0" spc="4" kern="0">
